--- a/n8n.pptx
+++ b/n8n.pptx
@@ -258,7 +258,7 @@
                 <a:latin typeface="맑은 고딕" panose="020B0503020000020004" pitchFamily="50" charset="-127"/>
                 <a:ea typeface="맑은 고딕" panose="020B0503020000020004" pitchFamily="50" charset="-127"/>
               </a:rPr>
-              <a:t>2026-07-24</a:t>
+              <a:t>2026-07-25</a:t>
             </a:fld>
             <a:endParaRPr lang="ko-KR" altLang="en-US">
               <a:latin typeface="맑은 고딕" panose="020B0503020000020004" pitchFamily="50" charset="-127"/>
@@ -444,7 +444,7 @@
           <a:p>
             <a:fld id="{43E1C3DD-4A19-441D-907C-380838DB51C4}" type="datetime1">
               <a:rPr lang="ko-KR" altLang="en-US" noProof="0" smtClean="0"/>
-              <a:t>2026-07-24</a:t>
+              <a:t>2026-07-25</a:t>
             </a:fld>
             <a:endParaRPr lang="ko-KR" altLang="en-US" noProof="0"/>
           </a:p>
@@ -1292,7 +1292,7 @@
           <a:p>
             <a:fld id="{990475B5-67CA-4281-BDCA-DA943C3C8EB3}" type="datetime1">
               <a:rPr lang="ko-KR" altLang="en-US" noProof="0" smtClean="0"/>
-              <a:t>2026-07-24</a:t>
+              <a:t>2026-07-25</a:t>
             </a:fld>
             <a:endParaRPr lang="ko-KR" altLang="en-US" noProof="0"/>
           </a:p>
@@ -1946,7 +1946,7 @@
           <a:p>
             <a:fld id="{48A87A34-81AB-432B-8DAE-1953F412C126}" type="datetimeFigureOut">
               <a:rPr lang="en-US" smtClean="0"/>
-              <a:t>7/24/2026</a:t>
+              <a:t>7/25/2026</a:t>
             </a:fld>
             <a:endParaRPr lang="en-US" dirty="0"/>
           </a:p>
@@ -2242,7 +2242,7 @@
           <a:p>
             <a:fld id="{C655C81E-72E7-4D05-94B5-F45B321A525D}" type="datetime1">
               <a:rPr lang="ko-KR" altLang="en-US" noProof="0" smtClean="0"/>
-              <a:t>2026-07-24</a:t>
+              <a:t>2026-07-25</a:t>
             </a:fld>
             <a:endParaRPr lang="ko-KR" altLang="en-US" noProof="0" dirty="0">
               <a:latin typeface="맑은 고딕" panose="020B0503020000020004" pitchFamily="50" charset="-127"/>
@@ -5250,8 +5250,8 @@
         </p:nvSpPr>
         <p:spPr>
           <a:xfrm>
-            <a:off x="582095" y="2186897"/>
-            <a:ext cx="11066980" cy="2484206"/>
+            <a:off x="582095" y="2684810"/>
+            <a:ext cx="11066980" cy="2853538"/>
           </a:xfrm>
           <a:prstGeom prst="rect">
             <a:avLst/>
@@ -5549,7 +5549,7 @@
               <a:buChar char="v"/>
             </a:pPr>
             <a:r>
-              <a:rPr lang="en-US" altLang="ko-KR" sz="1600" dirty="0">
+              <a:rPr lang="en-US" altLang="ko-KR" sz="1400" dirty="0">
                 <a:solidFill>
                   <a:schemeClr val="accent5"/>
                 </a:solidFill>
@@ -5560,7 +5560,7 @@
               <a:t>AI "</a:t>
             </a:r>
             <a:r>
-              <a:rPr lang="ko-KR" altLang="en-US" sz="1600" dirty="0">
+              <a:rPr lang="ko-KR" altLang="en-US" sz="1400" dirty="0">
                 <a:solidFill>
                   <a:schemeClr val="accent5"/>
                 </a:solidFill>
@@ -5571,7 +5571,7 @@
               <a:t>딸깍</a:t>
             </a:r>
             <a:r>
-              <a:rPr lang="en-US" altLang="ko-KR" sz="1600" dirty="0">
+              <a:rPr lang="en-US" altLang="ko-KR" sz="1400" dirty="0">
                 <a:solidFill>
                   <a:schemeClr val="accent5"/>
                 </a:solidFill>
@@ -5582,7 +5582,7 @@
               <a:t>" </a:t>
             </a:r>
             <a:r>
-              <a:rPr lang="ko-KR" altLang="en-US" sz="1600" dirty="0">
+              <a:rPr lang="ko-KR" altLang="en-US" sz="1400" dirty="0">
                 <a:solidFill>
                   <a:schemeClr val="accent5"/>
                 </a:solidFill>
@@ -5593,7 +5593,7 @@
               <a:t>으로 만드는 슈퍼자동화 시나리오</a:t>
             </a:r>
             <a:r>
-              <a:rPr lang="en-US" altLang="ko-KR" sz="1600" dirty="0">
+              <a:rPr lang="en-US" altLang="ko-KR" sz="1400" dirty="0">
                 <a:solidFill>
                   <a:schemeClr val="accent5"/>
                 </a:solidFill>
@@ -5604,7 +5604,7 @@
               <a:t>! </a:t>
             </a:r>
             <a:r>
-              <a:rPr lang="ko-KR" altLang="en-US" sz="1600" dirty="0" err="1">
+              <a:rPr lang="ko-KR" altLang="en-US" sz="1400" dirty="0" err="1">
                 <a:solidFill>
                   <a:schemeClr val="accent5"/>
                 </a:solidFill>
@@ -5615,7 +5615,7 @@
               <a:t>클로드</a:t>
             </a:r>
             <a:r>
-              <a:rPr lang="en-US" altLang="ko-KR" sz="1600" dirty="0">
+              <a:rPr lang="en-US" altLang="ko-KR" sz="1400" dirty="0">
                 <a:solidFill>
                   <a:schemeClr val="accent5"/>
                 </a:solidFill>
@@ -5626,7 +5626,7 @@
               <a:t>4+MCP </a:t>
             </a:r>
             <a:r>
-              <a:rPr lang="ko-KR" altLang="en-US" sz="1600" dirty="0">
+              <a:rPr lang="ko-KR" altLang="en-US" sz="1400" dirty="0">
                 <a:solidFill>
                   <a:schemeClr val="accent5"/>
                 </a:solidFill>
@@ -5636,7 +5636,149 @@
               </a:rPr>
               <a:t>가 미쳤습니다</a:t>
             </a:r>
-            <a:endParaRPr lang="en-US" altLang="ko-KR" sz="1600" dirty="0">
+            <a:endParaRPr lang="en-US" altLang="ko-KR" sz="1400" dirty="0">
+              <a:solidFill>
+                <a:schemeClr val="accent5"/>
+              </a:solidFill>
+              <a:latin typeface="D2Coding" panose="020B0609020101020101" pitchFamily="49" charset="-127"/>
+              <a:ea typeface="D2Coding" panose="020B0609020101020101" pitchFamily="49" charset="-127"/>
+            </a:endParaRPr>
+          </a:p>
+          <a:p>
+            <a:pPr marL="742950" lvl="1" indent="-285750">
+              <a:lnSpc>
+                <a:spcPct val="200000"/>
+              </a:lnSpc>
+              <a:buFont typeface="Wingdings" panose="05000000000000000000" pitchFamily="2" charset="2"/>
+              <a:buChar char="v"/>
+            </a:pPr>
+            <a:r>
+              <a:rPr lang="en-US" altLang="ko-KR" sz="1400" dirty="0">
+                <a:latin typeface="D2Coding" panose="020B0609020101020101" pitchFamily="49" charset="-127"/>
+                <a:ea typeface="D2Coding" panose="020B0609020101020101" pitchFamily="49" charset="-127"/>
+                <a:sym typeface="Wingdings" panose="05000000000000000000" pitchFamily="2" charset="2"/>
+                <a:hlinkClick r:id="rId3"/>
+              </a:rPr>
+              <a:t>n8n </a:t>
+            </a:r>
+            <a:r>
+              <a:rPr lang="ko-KR" altLang="en-US" sz="1400" dirty="0">
+                <a:latin typeface="D2Coding" panose="020B0609020101020101" pitchFamily="49" charset="-127"/>
+                <a:ea typeface="D2Coding" panose="020B0609020101020101" pitchFamily="49" charset="-127"/>
+                <a:sym typeface="Wingdings" panose="05000000000000000000" pitchFamily="2" charset="2"/>
+                <a:hlinkClick r:id="rId3"/>
+              </a:rPr>
+              <a:t>노가다 끝</a:t>
+            </a:r>
+            <a:r>
+              <a:rPr lang="en-US" altLang="ko-KR" sz="1400" dirty="0">
+                <a:latin typeface="D2Coding" panose="020B0609020101020101" pitchFamily="49" charset="-127"/>
+                <a:ea typeface="D2Coding" panose="020B0609020101020101" pitchFamily="49" charset="-127"/>
+                <a:sym typeface="Wingdings" panose="05000000000000000000" pitchFamily="2" charset="2"/>
+                <a:hlinkClick r:id="rId3"/>
+              </a:rPr>
+              <a:t>: </a:t>
+            </a:r>
+            <a:r>
+              <a:rPr lang="ko-KR" altLang="en-US" sz="1400" dirty="0" err="1">
+                <a:latin typeface="D2Coding" panose="020B0609020101020101" pitchFamily="49" charset="-127"/>
+                <a:ea typeface="D2Coding" panose="020B0609020101020101" pitchFamily="49" charset="-127"/>
+                <a:sym typeface="Wingdings" panose="05000000000000000000" pitchFamily="2" charset="2"/>
+                <a:hlinkClick r:id="rId3"/>
+              </a:rPr>
+              <a:t>클로드로</a:t>
+            </a:r>
+            <a:r>
+              <a:rPr lang="ko-KR" altLang="en-US" sz="1400" dirty="0">
+                <a:latin typeface="D2Coding" panose="020B0609020101020101" pitchFamily="49" charset="-127"/>
+                <a:ea typeface="D2Coding" panose="020B0609020101020101" pitchFamily="49" charset="-127"/>
+                <a:sym typeface="Wingdings" panose="05000000000000000000" pitchFamily="2" charset="2"/>
+                <a:hlinkClick r:id="rId3"/>
+              </a:rPr>
+              <a:t> 워크플로우 자동 생성하는 </a:t>
+            </a:r>
+            <a:r>
+              <a:rPr lang="en-US" altLang="ko-KR" sz="1400" dirty="0">
+                <a:latin typeface="D2Coding" panose="020B0609020101020101" pitchFamily="49" charset="-127"/>
+                <a:ea typeface="D2Coding" panose="020B0609020101020101" pitchFamily="49" charset="-127"/>
+                <a:sym typeface="Wingdings" panose="05000000000000000000" pitchFamily="2" charset="2"/>
+                <a:hlinkClick r:id="rId3"/>
+              </a:rPr>
+              <a:t>'8</a:t>
+            </a:r>
+            <a:r>
+              <a:rPr lang="ko-KR" altLang="en-US" sz="1400" dirty="0">
+                <a:latin typeface="D2Coding" panose="020B0609020101020101" pitchFamily="49" charset="-127"/>
+                <a:ea typeface="D2Coding" panose="020B0609020101020101" pitchFamily="49" charset="-127"/>
+                <a:sym typeface="Wingdings" panose="05000000000000000000" pitchFamily="2" charset="2"/>
+                <a:hlinkClick r:id="rId3"/>
+              </a:rPr>
+              <a:t>단계 프롬프트 </a:t>
+            </a:r>
+            <a:r>
+              <a:rPr lang="en-US" altLang="ko-KR" sz="1400" dirty="0">
+                <a:latin typeface="D2Coding" panose="020B0609020101020101" pitchFamily="49" charset="-127"/>
+                <a:ea typeface="D2Coding" panose="020B0609020101020101" pitchFamily="49" charset="-127"/>
+                <a:sym typeface="Wingdings" panose="05000000000000000000" pitchFamily="2" charset="2"/>
+                <a:hlinkClick r:id="rId3"/>
+              </a:rPr>
+              <a:t>+ MCP </a:t>
+            </a:r>
+            <a:r>
+              <a:rPr lang="ko-KR" altLang="en-US" sz="1400" dirty="0">
+                <a:latin typeface="D2Coding" panose="020B0609020101020101" pitchFamily="49" charset="-127"/>
+                <a:ea typeface="D2Coding" panose="020B0609020101020101" pitchFamily="49" charset="-127"/>
+                <a:sym typeface="Wingdings" panose="05000000000000000000" pitchFamily="2" charset="2"/>
+                <a:hlinkClick r:id="rId3"/>
+              </a:rPr>
+              <a:t>세팅</a:t>
+            </a:r>
+            <a:r>
+              <a:rPr lang="en-US" altLang="ko-KR" sz="1400" dirty="0">
+                <a:latin typeface="D2Coding" panose="020B0609020101020101" pitchFamily="49" charset="-127"/>
+                <a:ea typeface="D2Coding" panose="020B0609020101020101" pitchFamily="49" charset="-127"/>
+                <a:sym typeface="Wingdings" panose="05000000000000000000" pitchFamily="2" charset="2"/>
+                <a:hlinkClick r:id="rId3"/>
+              </a:rPr>
+              <a:t>' (</a:t>
+            </a:r>
+            <a:r>
+              <a:rPr lang="ko-KR" altLang="en-US" sz="1400" dirty="0">
+                <a:latin typeface="D2Coding" panose="020B0609020101020101" pitchFamily="49" charset="-127"/>
+                <a:ea typeface="D2Coding" panose="020B0609020101020101" pitchFamily="49" charset="-127"/>
+                <a:sym typeface="Wingdings" panose="05000000000000000000" pitchFamily="2" charset="2"/>
+                <a:hlinkClick r:id="rId3"/>
+              </a:rPr>
+              <a:t>성공률 </a:t>
+            </a:r>
+            <a:r>
+              <a:rPr lang="en-US" altLang="ko-KR" sz="1400" dirty="0">
+                <a:latin typeface="D2Coding" panose="020B0609020101020101" pitchFamily="49" charset="-127"/>
+                <a:ea typeface="D2Coding" panose="020B0609020101020101" pitchFamily="49" charset="-127"/>
+                <a:sym typeface="Wingdings" panose="05000000000000000000" pitchFamily="2" charset="2"/>
+                <a:hlinkClick r:id="rId3"/>
+              </a:rPr>
+              <a:t>10</a:t>
+            </a:r>
+            <a:r>
+              <a:rPr lang="ko-KR" altLang="en-US" sz="1400" dirty="0">
+                <a:latin typeface="D2Coding" panose="020B0609020101020101" pitchFamily="49" charset="-127"/>
+                <a:ea typeface="D2Coding" panose="020B0609020101020101" pitchFamily="49" charset="-127"/>
+                <a:sym typeface="Wingdings" panose="05000000000000000000" pitchFamily="2" charset="2"/>
+                <a:hlinkClick r:id="rId3"/>
+              </a:rPr>
+              <a:t>배</a:t>
+            </a:r>
+            <a:r>
+              <a:rPr lang="en-US" altLang="ko-KR" sz="1400" dirty="0">
+                <a:latin typeface="D2Coding" panose="020B0609020101020101" pitchFamily="49" charset="-127"/>
+                <a:ea typeface="D2Coding" panose="020B0609020101020101" pitchFamily="49" charset="-127"/>
+                <a:sym typeface="Wingdings" panose="05000000000000000000" pitchFamily="2" charset="2"/>
+                <a:hlinkClick r:id="rId3"/>
+              </a:rPr>
+              <a:t>)</a:t>
+            </a:r>
+            <a:endParaRPr lang="en-US" altLang="ko-KR" sz="1400" dirty="0">
               <a:latin typeface="D2Coding" panose="020B0609020101020101" pitchFamily="49" charset="-127"/>
               <a:ea typeface="D2Coding" panose="020B0609020101020101" pitchFamily="49" charset="-127"/>
               <a:sym typeface="Wingdings" panose="05000000000000000000" pitchFamily="2" charset="2"/>
@@ -5699,6 +5841,168 @@
               <a:t> 연결</a:t>
             </a:r>
             <a:endParaRPr lang="ko-KR" altLang="en-US" sz="1600" dirty="0"/>
+          </a:p>
+        </p:txBody>
+      </p:sp>
+      <p:sp>
+        <p:nvSpPr>
+          <p:cNvPr id="2" name="TextBox 1">
+            <a:extLst>
+              <a:ext uri="{FF2B5EF4-FFF2-40B4-BE49-F238E27FC236}">
+                <a16:creationId xmlns:a16="http://schemas.microsoft.com/office/drawing/2014/main" id="{EC80D5E0-C6FF-6BBF-600F-FAA66AF19197}"/>
+              </a:ext>
+            </a:extLst>
+          </p:cNvPr>
+          <p:cNvSpPr txBox="1"/>
+          <p:nvPr/>
+        </p:nvSpPr>
+        <p:spPr>
+          <a:xfrm>
+            <a:off x="582095" y="1400175"/>
+            <a:ext cx="11143180" cy="880819"/>
+          </a:xfrm>
+          <a:prstGeom prst="rect">
+            <a:avLst/>
+          </a:prstGeom>
+          <a:noFill/>
+        </p:spPr>
+        <p:txBody>
+          <a:bodyPr wrap="square" rtlCol="0">
+            <a:spAutoFit/>
+          </a:bodyPr>
+          <a:lstStyle/>
+          <a:p>
+            <a:pPr>
+              <a:lnSpc>
+                <a:spcPct val="150000"/>
+              </a:lnSpc>
+            </a:pPr>
+            <a:r>
+              <a:rPr lang="en-US" altLang="ko-KR" dirty="0">
+                <a:latin typeface="D2Coding" panose="020B0609020101020101" pitchFamily="49" charset="-127"/>
+                <a:ea typeface="D2Coding" panose="020B0609020101020101" pitchFamily="49" charset="-127"/>
+              </a:rPr>
+              <a:t>LLM</a:t>
+            </a:r>
+            <a:r>
+              <a:rPr lang="ko-KR" altLang="en-US" dirty="0">
+                <a:latin typeface="D2Coding" panose="020B0609020101020101" pitchFamily="49" charset="-127"/>
+                <a:ea typeface="D2Coding" panose="020B0609020101020101" pitchFamily="49" charset="-127"/>
+              </a:rPr>
+              <a:t>에게 </a:t>
+            </a:r>
+            <a:r>
+              <a:rPr lang="en-US" altLang="ko-KR" dirty="0">
+                <a:latin typeface="D2Coding" panose="020B0609020101020101" pitchFamily="49" charset="-127"/>
+                <a:ea typeface="D2Coding" panose="020B0609020101020101" pitchFamily="49" charset="-127"/>
+              </a:rPr>
+              <a:t>n8n </a:t>
+            </a:r>
+            <a:r>
+              <a:rPr lang="ko-KR" altLang="en-US" dirty="0">
+                <a:latin typeface="D2Coding" panose="020B0609020101020101" pitchFamily="49" charset="-127"/>
+                <a:ea typeface="D2Coding" panose="020B0609020101020101" pitchFamily="49" charset="-127"/>
+              </a:rPr>
+              <a:t>코드를 부탁해서 복사하고 </a:t>
+            </a:r>
+            <a:r>
+              <a:rPr lang="en-US" altLang="ko-KR" dirty="0">
+                <a:latin typeface="D2Coding" panose="020B0609020101020101" pitchFamily="49" charset="-127"/>
+                <a:ea typeface="D2Coding" panose="020B0609020101020101" pitchFamily="49" charset="-127"/>
+              </a:rPr>
+              <a:t>n8n</a:t>
+            </a:r>
+            <a:r>
+              <a:rPr lang="ko-KR" altLang="en-US" dirty="0">
+                <a:latin typeface="D2Coding" panose="020B0609020101020101" pitchFamily="49" charset="-127"/>
+                <a:ea typeface="D2Coding" panose="020B0609020101020101" pitchFamily="49" charset="-127"/>
+              </a:rPr>
+              <a:t>에 붙여넣기 </a:t>
+            </a:r>
+            <a:r>
+              <a:rPr lang="en-US" altLang="ko-KR" dirty="0">
+                <a:latin typeface="D2Coding" panose="020B0609020101020101" pitchFamily="49" charset="-127"/>
+                <a:ea typeface="D2Coding" panose="020B0609020101020101" pitchFamily="49" charset="-127"/>
+                <a:sym typeface="Wingdings" panose="05000000000000000000" pitchFamily="2" charset="2"/>
+              </a:rPr>
+              <a:t> LLM</a:t>
+            </a:r>
+            <a:r>
+              <a:rPr lang="ko-KR" altLang="en-US" dirty="0">
+                <a:latin typeface="D2Coding" panose="020B0609020101020101" pitchFamily="49" charset="-127"/>
+                <a:ea typeface="D2Coding" panose="020B0609020101020101" pitchFamily="49" charset="-127"/>
+                <a:sym typeface="Wingdings" panose="05000000000000000000" pitchFamily="2" charset="2"/>
+              </a:rPr>
+              <a:t>에게 </a:t>
+            </a:r>
+            <a:r>
+              <a:rPr lang="en-US" altLang="ko-KR" dirty="0">
+                <a:latin typeface="D2Coding" panose="020B0609020101020101" pitchFamily="49" charset="-127"/>
+                <a:ea typeface="D2Coding" panose="020B0609020101020101" pitchFamily="49" charset="-127"/>
+                <a:sym typeface="Wingdings" panose="05000000000000000000" pitchFamily="2" charset="2"/>
+              </a:rPr>
+              <a:t>MCP serve</a:t>
+            </a:r>
+            <a:r>
+              <a:rPr lang="ko-KR" altLang="en-US" dirty="0">
+                <a:latin typeface="D2Coding" panose="020B0609020101020101" pitchFamily="49" charset="-127"/>
+                <a:ea typeface="D2Coding" panose="020B0609020101020101" pitchFamily="49" charset="-127"/>
+                <a:sym typeface="Wingdings" panose="05000000000000000000" pitchFamily="2" charset="2"/>
+              </a:rPr>
+              <a:t>를 붙여 </a:t>
+            </a:r>
+            <a:r>
+              <a:rPr lang="en-US" altLang="ko-KR" dirty="0">
+                <a:latin typeface="D2Coding" panose="020B0609020101020101" pitchFamily="49" charset="-127"/>
+                <a:ea typeface="D2Coding" panose="020B0609020101020101" pitchFamily="49" charset="-127"/>
+                <a:sym typeface="Wingdings" panose="05000000000000000000" pitchFamily="2" charset="2"/>
+              </a:rPr>
+              <a:t>n8n </a:t>
+            </a:r>
+            <a:r>
+              <a:rPr lang="ko-KR" altLang="en-US" dirty="0">
+                <a:latin typeface="D2Coding" panose="020B0609020101020101" pitchFamily="49" charset="-127"/>
+                <a:ea typeface="D2Coding" panose="020B0609020101020101" pitchFamily="49" charset="-127"/>
+                <a:sym typeface="Wingdings" panose="05000000000000000000" pitchFamily="2" charset="2"/>
+              </a:rPr>
+              <a:t>코드를 부탁하면 </a:t>
+            </a:r>
+            <a:r>
+              <a:rPr lang="en-US" altLang="ko-KR" dirty="0">
+                <a:latin typeface="D2Coding" panose="020B0609020101020101" pitchFamily="49" charset="-127"/>
+                <a:ea typeface="D2Coding" panose="020B0609020101020101" pitchFamily="49" charset="-127"/>
+                <a:sym typeface="Wingdings" panose="05000000000000000000" pitchFamily="2" charset="2"/>
+              </a:rPr>
+              <a:t>(</a:t>
+            </a:r>
+            <a:r>
+              <a:rPr lang="en-US" altLang="ko-KR" dirty="0" err="1">
+                <a:latin typeface="D2Coding" panose="020B0609020101020101" pitchFamily="49" charset="-127"/>
+                <a:ea typeface="D2Coding" panose="020B0609020101020101" pitchFamily="49" charset="-127"/>
+                <a:sym typeface="Wingdings" panose="05000000000000000000" pitchFamily="2" charset="2"/>
+              </a:rPr>
+              <a:t>json</a:t>
+            </a:r>
+            <a:r>
+              <a:rPr lang="ko-KR" altLang="en-US" dirty="0">
+                <a:latin typeface="D2Coding" panose="020B0609020101020101" pitchFamily="49" charset="-127"/>
+                <a:ea typeface="D2Coding" panose="020B0609020101020101" pitchFamily="49" charset="-127"/>
+                <a:sym typeface="Wingdings" panose="05000000000000000000" pitchFamily="2" charset="2"/>
+              </a:rPr>
+              <a:t>으로 소통</a:t>
+            </a:r>
+            <a:r>
+              <a:rPr lang="en-US" altLang="ko-KR" dirty="0">
+                <a:latin typeface="D2Coding" panose="020B0609020101020101" pitchFamily="49" charset="-127"/>
+                <a:ea typeface="D2Coding" panose="020B0609020101020101" pitchFamily="49" charset="-127"/>
+                <a:sym typeface="Wingdings" panose="05000000000000000000" pitchFamily="2" charset="2"/>
+              </a:rPr>
+              <a:t>)</a:t>
+            </a:r>
+            <a:endParaRPr lang="ko-KR" altLang="en-US" dirty="0">
+              <a:latin typeface="D2Coding" panose="020B0609020101020101" pitchFamily="49" charset="-127"/>
+              <a:ea typeface="D2Coding" panose="020B0609020101020101" pitchFamily="49" charset="-127"/>
+            </a:endParaRPr>
           </a:p>
         </p:txBody>
       </p:sp>
